--- a/decks/hist-russian-revolution/hist-russian-revolution_ch4_february-1917.pptx
+++ b/decks/hist-russian-revolution/hist-russian-revolution_ch4_february-1917.pptx
@@ -129,30 +129,30 @@
   <p:extLst>
     <p:ext uri="{521415D9-36F7-43E2-AB2F-B90AF26B5E84}">
       <p14:sectionLst xmlns:p14="http://schemas.microsoft.com/office/powerpoint/2010/main">
-        <p14:section name="Opening" id="{602b2751-7fa5-1d5a-fa49-6ffa45fb1124}">
+        <p14:section name="Opening" id="{bfd946f5-7a2d-f2a7-18ec-eefd9d1a0a1a}">
           <p14:sldIdLst>
             <p14:sldId id="256"/>
           </p14:sldIdLst>
         </p14:section>
-        <p14:section name="Gate" id="{ba51ec80-b5fe-ace1-8399-4f80e52cd366}">
+        <p14:section name="Gate" id="{b86566ff-cc08-65b9-c45a-6d20169b9865}">
           <p14:sldIdLst>
             <p14:sldId id="257"/>
             <p14:sldId id="258"/>
           </p14:sldIdLst>
         </p14:section>
-        <p14:section name="Pre-teach" id="{99bd69af-4b8a-b59d-2f3e-0480359ab174}">
+        <p14:section name="Pre-teach" id="{3bceaf40-9d8d-6ce3-5962-653f8d28612a}">
           <p14:sldIdLst>
             <p14:sldId id="259"/>
             <p14:sldId id="260"/>
           </p14:sldIdLst>
         </p14:section>
-        <p14:section name="Read-along" id="{3b725478-2cac-6a5b-e73a-4f72c9606128}">
+        <p14:section name="Read-along" id="{80155acc-167a-5400-4d65-34e09cce59b8}">
           <p14:sldIdLst>
             <p14:sldId id="261"/>
             <p14:sldId id="262"/>
           </p14:sldIdLst>
         </p14:section>
-        <p14:section name="Teach" id="{d89bfdb3-43b7-2b2f-3db7-b9e48a01198b}">
+        <p14:section name="Teach" id="{5e488193-1652-6b2a-7972-f9982c982979}">
           <p14:sldIdLst>
             <p14:sldId id="263"/>
             <p14:sldId id="264"/>
@@ -162,7 +162,7 @@
             <p14:sldId id="268"/>
           </p14:sldIdLst>
         </p14:section>
-        <p14:section name="Routes" id="{53be439e-0149-52a0-b0ac-5fed6519698b}">
+        <p14:section name="Routes" id="{1473bb2d-4339-952e-6ceb-ca4c3b70ae71}">
           <p14:sldIdLst>
             <p14:sldId id="269"/>
             <p14:sldId id="270"/>
@@ -170,12 +170,12 @@
             <p14:sldId id="272"/>
           </p14:sldIdLst>
         </p14:section>
-        <p14:section name="Close" id="{e8aabc9d-9c15-529a-d63b-3fe829ce09c4}">
+        <p14:section name="Close" id="{8fbdd891-442f-c3c4-753b-7eb68972c484}">
           <p14:sldIdLst>
             <p14:sldId id="273"/>
           </p14:sldIdLst>
         </p14:section>
-        <p14:section name="Answers" id="{c6a7a73f-681a-6c7c-a408-159e2da93b1c}">
+        <p14:section name="Answers" id="{4080a5d0-fc22-93c8-2635-3fadf21e73a8}">
           <p14:sldIdLst>
             <p14:sldId id="274"/>
             <p14:sldId id="275"/>
@@ -1795,7 +1795,7 @@
               <a:t>Answers — task 2: A narrative paragraph on the events. Reveal the answer; pupils mark their own work in a different colour, then read the "why" together. Same destination for every lane, so one answer serves the whole class.
 Answer: My events are in a clear order, and I state at least one date with its calendar named.; I link each event to the next with a phrase such as this led to or as a result.; I use specific knowledge, such as the Putilov strike, the figure of 250,000 strikers, or the soldiers' mutiny.; My last sentence links on to what came next, the abdication or the Provisional Government.; I write about the people involved as people, not just as crowds and numbers.
 Why: Your lesson's criteria reward sequence, explained links, specific knowledge and a closing link onwards. The events themselves are easy to remember; the marks sit in the joins between them.
-Model answer: The February Revolution began in Petrograd with strikes over bread, poor conditions and the failing war. On 7 March, New Style, workers at the huge Putilov steel works walked out, and the next day thousands of women joined the marches for International Women's Day, demanding bread and peace. This led to a general strike: within three days around 250,000 workers had stopped work, and industry and transport in the capital came to a halt. As a result the Tsar ordered the Duma to disband and the army to restore order, but both refused him, and soldiers began to mutiny and join the crowds instead. This left him with nothing to rule with, so when he tried to return to Petrograd and railway workers stopped his train, he agreed on 15 March, New Style, to abdicate. His brother Michael refused the throne, which ended three hundred years of Romanov rule and left the Provisional Government and the Petrograd Soviet sharing power.
+Model answer: The February Revolution began in Petrograd with strikes over bread, poor conditions and the failing war. On 7 March, New Style, workers at the huge Putilov steel works walked out, and the next day thousands of women joined the marches for International Women's Day, demanding bread and peace. This led to a general strike: within three days around 250,000 workers had stopped work, and industry and transport in the capital came to a halt. As a result the Tsar told the Duma to dissolve itself and ordered the army to put the protests down, and neither obeyed him; soldiers began to mutiny and join the crowds instead. This left him with nothing to rule with, so when he tried to return to Petrograd and railway workers stopped his train, he agreed on 15 March, New Style, to abdicate. His brother Michael refused the throne, which ended three hundred years of Romanov rule and left the Provisional Government and the Petrograd Soviet sharing power.
 Success criteria: My events are in a clear order, and I state at least one date with its calendar named.; I link each event to the next with a phrase such as this led to or as a result.; I use specific knowledge, such as the Putilov strike, the figure of 250,000 strikers, or the soldiers' mutiny.; My last sentence links on to what came next, the abdication or the Provisional Government.; I write about the people involved as people, not just as crowds and numbers.
 Ask a Support pupil to explain one step, and a Stretch pupil to share their extension.</a:t>
             </a:r>
@@ -1888,7 +1888,7 @@
               <a:t>Answers — task 2: A narrative paragraph on the events. Reveal the answer; pupils mark their own work in a different colour, then read the "why" together. Same destination for every lane, so one answer serves the whole class.
 Answer: My events are in a clear order, and I state at least one date with its calendar named.; I link each event to the next with a phrase such as this led to or as a result.; I use specific knowledge, such as the Putilov strike, the figure of 250,000 strikers, or the soldiers' mutiny.; My last sentence links on to what came next, the abdication or the Provisional Government.; I write about the people involved as people, not just as crowds and numbers.
 Why: Your lesson's criteria reward sequence, explained links, specific knowledge and a closing link onwards. The events themselves are easy to remember; the marks sit in the joins between them.
-Model answer: The February Revolution began in Petrograd with strikes over bread, poor conditions and the failing war. On 7 March, New Style, workers at the huge Putilov steel works walked out, and the next day thousands of women joined the marches for International Women's Day, demanding bread and peace. This led to a general strike: within three days around 250,000 workers had stopped work, and industry and transport in the capital came to a halt. As a result the Tsar ordered the Duma to disband and the army to restore order, but both refused him, and soldiers began to mutiny and join the crowds instead. This left him with nothing to rule with, so when he tried to return to Petrograd and railway workers stopped his train, he agreed on 15 March, New Style, to abdicate. His brother Michael refused the throne, which ended three hundred years of Romanov rule and left the Provisional Government and the Petrograd Soviet sharing power.
+Model answer: The February Revolution began in Petrograd with strikes over bread, poor conditions and the failing war. On 7 March, New Style, workers at the huge Putilov steel works walked out, and the next day thousands of women joined the marches for International Women's Day, demanding bread and peace. This led to a general strike: within three days around 250,000 workers had stopped work, and industry and transport in the capital came to a halt. As a result the Tsar told the Duma to dissolve itself and ordered the army to put the protests down, and neither obeyed him; soldiers began to mutiny and join the crowds instead. This left him with nothing to rule with, so when he tried to return to Petrograd and railway workers stopped his train, he agreed on 15 March, New Style, to abdicate. His brother Michael refused the throne, which ended three hundred years of Romanov rule and left the Provisional Government and the Petrograd Soviet sharing power.
 Success criteria: My events are in a clear order, and I state at least one date with its calendar named.; I link each event to the next with a phrase such as this led to or as a result.; I use specific knowledge, such as the Putilov strike, the figure of 250,000 strikers, or the soldiers' mutiny.; My last sentence links on to what came next, the abdication or the Provisional Government.; I write about the people involved as people, not just as crowds and numbers.
 Ask a Support pupil to explain one step, and a Stretch pupil to share their extension.</a:t>
             </a:r>
@@ -2637,7 +2637,7 @@
               <a:t>Teach — Eight days in Petrograd. Say it in your own words, then check understanding with a quick question: ask a pupil from the pre-teach group first, since they met these words and ideas before the lesson. Pupils try to recall before you re-explain.
 Your lesson asks you to summarise the revolution into six key moments, and they are worth learning as a sequence. First, strikes begin: through January and February 1917 food shortages, bad conditions and the failing war brought one Petrograd factory out after another, and some soldiers were already sympathising with the protesters. Second, on 7 March, New Style, the huge Putilov steel works came out, and the next day thousands of women joined the marches for International Women's Day, demanding bread, peace and better conditions.
 Third, the strikes became general. Between 7 and 10 March, New Style, your lesson says the number of strikers rose to 250,000, which stopped all industry and transport in the capital; the police could not control the crowds and some officers joined them. Fourth, the Tsar lost control. Between 10 and 12 March, New Style, the Duma set up a Provisional Government. Nicholas ordered the Duma to disband and the army to restore order, and both refused him.
-Fifth, on 12 March, New Style, the Petrograd Soviet was re-established, a council of workers and soldiers that took charge of the city, with similar soviets forming across Russia. Sixth, on 15 March, New Style, with no support from either the army or the government, Nicholas II abdicated. A plan for his brother Michael to take the throne collapsed when Michael refused it, and three hundred years of Romanov rule came to an end.
+Fifth, on 12 March, New Style, the Petrograd Soviet was re-established, a council of workers and soldiers that took charge of the city, with similar soviets forming across Russia. Sixth, on 15 March, New Style, with no support from either the army or the government, Nicholas II abdicated. The crown was offered next to his brother Michael, who refused it, and three hundred years of Romanov rule came to an end.
 Tip: Learn the six moments as a shape: strikes, women's march, general strike, orders refused, soviet takes the city, abdication.</a:t>
             </a:r>
             <a:endParaRPr lang="en-US" dirty="0"/>
@@ -12990,7 +12990,7 @@
                 <a:ea typeface="Calibri" pitchFamily="34" charset="-122"/>
                 <a:cs typeface="Calibri" pitchFamily="34" charset="-120"/>
               </a:rPr>
-              <a:t>The February Revolution began in Petrograd with strikes over bread, poor conditions and the failing war. On 7 March, New Style, workers at the huge Putilov steel works walked out, and the next day thousands of women joined the marches for International Women's Day, demanding bread and peace. This led to a general strike: within three days around 250,000 workers had stopped work, and industry and transport in the capital came to a halt. As a result the Tsar ordered the Duma to disband and the army to restore order, but both refused him, and soldiers began to mutiny and join the crowds instead. This left him with nothing to rule with, so when he tried to return to Petrograd and railway workers stopped his train, he agreed on 15 March, New Style, to abdicate. His brother Michael refused the throne, which ended three hundred years of Romanov rule and left the Provisional Government and the Petrograd Soviet sharing power.</a:t>
+              <a:t>The February Revolution began in Petrograd with strikes over bread, poor conditions and the failing war. On 7 March, New Style, workers at the huge Putilov steel works walked out, and the next day thousands of women joined the marches for International Women's Day, demanding bread and peace. This led to a general strike: within three days around 250,000 workers had stopped work, and industry and transport in the capital came to a halt. As a result the Tsar told the Duma to dissolve itself and ordered the army to put the protests down, and neither obeyed him; soldiers began to mutiny and join the crowds instead. This left him with nothing to rule with, so when he tried to return to Petrograd and railway workers stopped his train, he agreed on 15 March, New Style, to abdicate. His brother Michael refused the throne, which ended three hundred years of Romanov rule and left the Provisional Government and the Petrograd Soviet sharing power.</a:t>
             </a:r>
             <a:endParaRPr lang="en-US" sz="1800" dirty="0"/>
           </a:p>
